--- a/耶穌愛你_version2.pptx
+++ b/耶穌愛你_version2.pptx
@@ -163,7 +163,7 @@
           <a:lstStyle/>
           <a:p>
             <a:r>
-              <a:rPr lang="en-US" altLang="zh-TW" smtClean="0"/>
+              <a:rPr lang="en-US" altLang="zh-TW"/>
               <a:t>Click to edit Master title style</a:t>
             </a:r>
             <a:endParaRPr lang="zh-TW" altLang="en-US"/>
@@ -282,7 +282,7 @@
           </a:lstStyle>
           <a:p>
             <a:r>
-              <a:rPr lang="en-US" altLang="zh-TW" smtClean="0"/>
+              <a:rPr lang="en-US" altLang="zh-TW"/>
               <a:t>Click to edit Master subtitle style</a:t>
             </a:r>
             <a:endParaRPr lang="zh-TW" altLang="en-US"/>
@@ -306,7 +306,7 @@
           <a:p>
             <a:fld id="{EB320EF2-FA3C-443D-80BF-461CEB4436F5}" type="datetimeFigureOut">
               <a:rPr lang="zh-TW" altLang="en-US" smtClean="0"/>
-              <a:t>2021/12/25</a:t>
+              <a:t>2025/12/18</a:t>
             </a:fld>
             <a:endParaRPr lang="zh-TW" altLang="en-US"/>
           </a:p>
@@ -400,7 +400,7 @@
           <a:lstStyle/>
           <a:p>
             <a:r>
-              <a:rPr lang="en-US" altLang="zh-TW" smtClean="0"/>
+              <a:rPr lang="en-US" altLang="zh-TW"/>
               <a:t>Click to edit Master title style</a:t>
             </a:r>
             <a:endParaRPr lang="zh-TW" altLang="en-US"/>
@@ -424,35 +424,35 @@
           <a:p>
             <a:pPr lvl="0"/>
             <a:r>
-              <a:rPr lang="en-US" altLang="zh-TW" smtClean="0"/>
+              <a:rPr lang="en-US" altLang="zh-TW"/>
               <a:t>Edit Master text styles</a:t>
             </a:r>
           </a:p>
           <a:p>
             <a:pPr lvl="1"/>
             <a:r>
-              <a:rPr lang="en-US" altLang="zh-TW" smtClean="0"/>
+              <a:rPr lang="en-US" altLang="zh-TW"/>
               <a:t>Second level</a:t>
             </a:r>
           </a:p>
           <a:p>
             <a:pPr lvl="2"/>
             <a:r>
-              <a:rPr lang="en-US" altLang="zh-TW" smtClean="0"/>
+              <a:rPr lang="en-US" altLang="zh-TW"/>
               <a:t>Third level</a:t>
             </a:r>
           </a:p>
           <a:p>
             <a:pPr lvl="3"/>
             <a:r>
-              <a:rPr lang="en-US" altLang="zh-TW" smtClean="0"/>
+              <a:rPr lang="en-US" altLang="zh-TW"/>
               <a:t>Fourth level</a:t>
             </a:r>
           </a:p>
           <a:p>
             <a:pPr lvl="4"/>
             <a:r>
-              <a:rPr lang="en-US" altLang="zh-TW" smtClean="0"/>
+              <a:rPr lang="en-US" altLang="zh-TW"/>
               <a:t>Fifth level</a:t>
             </a:r>
             <a:endParaRPr lang="zh-TW" altLang="en-US"/>
@@ -476,7 +476,7 @@
           <a:p>
             <a:fld id="{EB320EF2-FA3C-443D-80BF-461CEB4436F5}" type="datetimeFigureOut">
               <a:rPr lang="zh-TW" altLang="en-US" smtClean="0"/>
-              <a:t>2021/12/25</a:t>
+              <a:t>2025/12/18</a:t>
             </a:fld>
             <a:endParaRPr lang="zh-TW" altLang="en-US"/>
           </a:p>
@@ -575,7 +575,7 @@
           <a:lstStyle/>
           <a:p>
             <a:r>
-              <a:rPr lang="en-US" altLang="zh-TW" smtClean="0"/>
+              <a:rPr lang="en-US" altLang="zh-TW"/>
               <a:t>Click to edit Master title style</a:t>
             </a:r>
             <a:endParaRPr lang="zh-TW" altLang="en-US"/>
@@ -604,35 +604,35 @@
           <a:p>
             <a:pPr lvl="0"/>
             <a:r>
-              <a:rPr lang="en-US" altLang="zh-TW" smtClean="0"/>
+              <a:rPr lang="en-US" altLang="zh-TW"/>
               <a:t>Edit Master text styles</a:t>
             </a:r>
           </a:p>
           <a:p>
             <a:pPr lvl="1"/>
             <a:r>
-              <a:rPr lang="en-US" altLang="zh-TW" smtClean="0"/>
+              <a:rPr lang="en-US" altLang="zh-TW"/>
               <a:t>Second level</a:t>
             </a:r>
           </a:p>
           <a:p>
             <a:pPr lvl="2"/>
             <a:r>
-              <a:rPr lang="en-US" altLang="zh-TW" smtClean="0"/>
+              <a:rPr lang="en-US" altLang="zh-TW"/>
               <a:t>Third level</a:t>
             </a:r>
           </a:p>
           <a:p>
             <a:pPr lvl="3"/>
             <a:r>
-              <a:rPr lang="en-US" altLang="zh-TW" smtClean="0"/>
+              <a:rPr lang="en-US" altLang="zh-TW"/>
               <a:t>Fourth level</a:t>
             </a:r>
           </a:p>
           <a:p>
             <a:pPr lvl="4"/>
             <a:r>
-              <a:rPr lang="en-US" altLang="zh-TW" smtClean="0"/>
+              <a:rPr lang="en-US" altLang="zh-TW"/>
               <a:t>Fifth level</a:t>
             </a:r>
             <a:endParaRPr lang="zh-TW" altLang="en-US"/>
@@ -656,7 +656,7 @@
           <a:p>
             <a:fld id="{EB320EF2-FA3C-443D-80BF-461CEB4436F5}" type="datetimeFigureOut">
               <a:rPr lang="zh-TW" altLang="en-US" smtClean="0"/>
-              <a:t>2021/12/25</a:t>
+              <a:t>2025/12/18</a:t>
             </a:fld>
             <a:endParaRPr lang="zh-TW" altLang="en-US"/>
           </a:p>
@@ -750,7 +750,7 @@
           <a:lstStyle/>
           <a:p>
             <a:r>
-              <a:rPr lang="en-US" altLang="zh-TW" smtClean="0"/>
+              <a:rPr lang="en-US" altLang="zh-TW"/>
               <a:t>Click to edit Master title style</a:t>
             </a:r>
             <a:endParaRPr lang="zh-TW" altLang="en-US"/>
@@ -774,35 +774,35 @@
           <a:p>
             <a:pPr lvl="0"/>
             <a:r>
-              <a:rPr lang="en-US" altLang="zh-TW" smtClean="0"/>
+              <a:rPr lang="en-US" altLang="zh-TW"/>
               <a:t>Edit Master text styles</a:t>
             </a:r>
           </a:p>
           <a:p>
             <a:pPr lvl="1"/>
             <a:r>
-              <a:rPr lang="en-US" altLang="zh-TW" smtClean="0"/>
+              <a:rPr lang="en-US" altLang="zh-TW"/>
               <a:t>Second level</a:t>
             </a:r>
           </a:p>
           <a:p>
             <a:pPr lvl="2"/>
             <a:r>
-              <a:rPr lang="en-US" altLang="zh-TW" smtClean="0"/>
+              <a:rPr lang="en-US" altLang="zh-TW"/>
               <a:t>Third level</a:t>
             </a:r>
           </a:p>
           <a:p>
             <a:pPr lvl="3"/>
             <a:r>
-              <a:rPr lang="en-US" altLang="zh-TW" smtClean="0"/>
+              <a:rPr lang="en-US" altLang="zh-TW"/>
               <a:t>Fourth level</a:t>
             </a:r>
           </a:p>
           <a:p>
             <a:pPr lvl="4"/>
             <a:r>
-              <a:rPr lang="en-US" altLang="zh-TW" smtClean="0"/>
+              <a:rPr lang="en-US" altLang="zh-TW"/>
               <a:t>Fifth level</a:t>
             </a:r>
             <a:endParaRPr lang="zh-TW" altLang="en-US"/>
@@ -826,7 +826,7 @@
           <a:p>
             <a:fld id="{EB320EF2-FA3C-443D-80BF-461CEB4436F5}" type="datetimeFigureOut">
               <a:rPr lang="zh-TW" altLang="en-US" smtClean="0"/>
-              <a:t>2021/12/25</a:t>
+              <a:t>2025/12/18</a:t>
             </a:fld>
             <a:endParaRPr lang="zh-TW" altLang="en-US"/>
           </a:p>
@@ -929,7 +929,7 @@
           </a:lstStyle>
           <a:p>
             <a:r>
-              <a:rPr lang="en-US" altLang="zh-TW" smtClean="0"/>
+              <a:rPr lang="en-US" altLang="zh-TW"/>
               <a:t>Click to edit Master title style</a:t>
             </a:r>
             <a:endParaRPr lang="zh-TW" altLang="en-US"/>
@@ -1049,7 +1049,7 @@
           <a:p>
             <a:pPr lvl="0"/>
             <a:r>
-              <a:rPr lang="en-US" altLang="zh-TW" smtClean="0"/>
+              <a:rPr lang="en-US" altLang="zh-TW"/>
               <a:t>Edit Master text styles</a:t>
             </a:r>
           </a:p>
@@ -1072,7 +1072,7 @@
           <a:p>
             <a:fld id="{EB320EF2-FA3C-443D-80BF-461CEB4436F5}" type="datetimeFigureOut">
               <a:rPr lang="zh-TW" altLang="en-US" smtClean="0"/>
-              <a:t>2021/12/25</a:t>
+              <a:t>2025/12/18</a:t>
             </a:fld>
             <a:endParaRPr lang="zh-TW" altLang="en-US"/>
           </a:p>
@@ -1166,7 +1166,7 @@
           <a:lstStyle/>
           <a:p>
             <a:r>
-              <a:rPr lang="en-US" altLang="zh-TW" smtClean="0"/>
+              <a:rPr lang="en-US" altLang="zh-TW"/>
               <a:t>Click to edit Master title style</a:t>
             </a:r>
             <a:endParaRPr lang="zh-TW" altLang="en-US"/>
@@ -1223,35 +1223,35 @@
           <a:p>
             <a:pPr lvl="0"/>
             <a:r>
-              <a:rPr lang="en-US" altLang="zh-TW" smtClean="0"/>
+              <a:rPr lang="en-US" altLang="zh-TW"/>
               <a:t>Edit Master text styles</a:t>
             </a:r>
           </a:p>
           <a:p>
             <a:pPr lvl="1"/>
             <a:r>
-              <a:rPr lang="en-US" altLang="zh-TW" smtClean="0"/>
+              <a:rPr lang="en-US" altLang="zh-TW"/>
               <a:t>Second level</a:t>
             </a:r>
           </a:p>
           <a:p>
             <a:pPr lvl="2"/>
             <a:r>
-              <a:rPr lang="en-US" altLang="zh-TW" smtClean="0"/>
+              <a:rPr lang="en-US" altLang="zh-TW"/>
               <a:t>Third level</a:t>
             </a:r>
           </a:p>
           <a:p>
             <a:pPr lvl="3"/>
             <a:r>
-              <a:rPr lang="en-US" altLang="zh-TW" smtClean="0"/>
+              <a:rPr lang="en-US" altLang="zh-TW"/>
               <a:t>Fourth level</a:t>
             </a:r>
           </a:p>
           <a:p>
             <a:pPr lvl="4"/>
             <a:r>
-              <a:rPr lang="en-US" altLang="zh-TW" smtClean="0"/>
+              <a:rPr lang="en-US" altLang="zh-TW"/>
               <a:t>Fifth level</a:t>
             </a:r>
             <a:endParaRPr lang="zh-TW" altLang="en-US"/>
@@ -1308,35 +1308,35 @@
           <a:p>
             <a:pPr lvl="0"/>
             <a:r>
-              <a:rPr lang="en-US" altLang="zh-TW" smtClean="0"/>
+              <a:rPr lang="en-US" altLang="zh-TW"/>
               <a:t>Edit Master text styles</a:t>
             </a:r>
           </a:p>
           <a:p>
             <a:pPr lvl="1"/>
             <a:r>
-              <a:rPr lang="en-US" altLang="zh-TW" smtClean="0"/>
+              <a:rPr lang="en-US" altLang="zh-TW"/>
               <a:t>Second level</a:t>
             </a:r>
           </a:p>
           <a:p>
             <a:pPr lvl="2"/>
             <a:r>
-              <a:rPr lang="en-US" altLang="zh-TW" smtClean="0"/>
+              <a:rPr lang="en-US" altLang="zh-TW"/>
               <a:t>Third level</a:t>
             </a:r>
           </a:p>
           <a:p>
             <a:pPr lvl="3"/>
             <a:r>
-              <a:rPr lang="en-US" altLang="zh-TW" smtClean="0"/>
+              <a:rPr lang="en-US" altLang="zh-TW"/>
               <a:t>Fourth level</a:t>
             </a:r>
           </a:p>
           <a:p>
             <a:pPr lvl="4"/>
             <a:r>
-              <a:rPr lang="en-US" altLang="zh-TW" smtClean="0"/>
+              <a:rPr lang="en-US" altLang="zh-TW"/>
               <a:t>Fifth level</a:t>
             </a:r>
             <a:endParaRPr lang="zh-TW" altLang="en-US"/>
@@ -1360,7 +1360,7 @@
           <a:p>
             <a:fld id="{EB320EF2-FA3C-443D-80BF-461CEB4436F5}" type="datetimeFigureOut">
               <a:rPr lang="zh-TW" altLang="en-US" smtClean="0"/>
-              <a:t>2021/12/25</a:t>
+              <a:t>2025/12/18</a:t>
             </a:fld>
             <a:endParaRPr lang="zh-TW" altLang="en-US"/>
           </a:p>
@@ -1458,7 +1458,7 @@
           </a:lstStyle>
           <a:p>
             <a:r>
-              <a:rPr lang="en-US" altLang="zh-TW" smtClean="0"/>
+              <a:rPr lang="en-US" altLang="zh-TW"/>
               <a:t>Click to edit Master title style</a:t>
             </a:r>
             <a:endParaRPr lang="zh-TW" altLang="en-US"/>
@@ -1524,7 +1524,7 @@
           <a:p>
             <a:pPr lvl="0"/>
             <a:r>
-              <a:rPr lang="en-US" altLang="zh-TW" smtClean="0"/>
+              <a:rPr lang="en-US" altLang="zh-TW"/>
               <a:t>Edit Master text styles</a:t>
             </a:r>
           </a:p>
@@ -1580,35 +1580,35 @@
           <a:p>
             <a:pPr lvl="0"/>
             <a:r>
-              <a:rPr lang="en-US" altLang="zh-TW" smtClean="0"/>
+              <a:rPr lang="en-US" altLang="zh-TW"/>
               <a:t>Edit Master text styles</a:t>
             </a:r>
           </a:p>
           <a:p>
             <a:pPr lvl="1"/>
             <a:r>
-              <a:rPr lang="en-US" altLang="zh-TW" smtClean="0"/>
+              <a:rPr lang="en-US" altLang="zh-TW"/>
               <a:t>Second level</a:t>
             </a:r>
           </a:p>
           <a:p>
             <a:pPr lvl="2"/>
             <a:r>
-              <a:rPr lang="en-US" altLang="zh-TW" smtClean="0"/>
+              <a:rPr lang="en-US" altLang="zh-TW"/>
               <a:t>Third level</a:t>
             </a:r>
           </a:p>
           <a:p>
             <a:pPr lvl="3"/>
             <a:r>
-              <a:rPr lang="en-US" altLang="zh-TW" smtClean="0"/>
+              <a:rPr lang="en-US" altLang="zh-TW"/>
               <a:t>Fourth level</a:t>
             </a:r>
           </a:p>
           <a:p>
             <a:pPr lvl="4"/>
             <a:r>
-              <a:rPr lang="en-US" altLang="zh-TW" smtClean="0"/>
+              <a:rPr lang="en-US" altLang="zh-TW"/>
               <a:t>Fifth level</a:t>
             </a:r>
             <a:endParaRPr lang="zh-TW" altLang="en-US"/>
@@ -1674,7 +1674,7 @@
           <a:p>
             <a:pPr lvl="0"/>
             <a:r>
-              <a:rPr lang="en-US" altLang="zh-TW" smtClean="0"/>
+              <a:rPr lang="en-US" altLang="zh-TW"/>
               <a:t>Edit Master text styles</a:t>
             </a:r>
           </a:p>
@@ -1730,35 +1730,35 @@
           <a:p>
             <a:pPr lvl="0"/>
             <a:r>
-              <a:rPr lang="en-US" altLang="zh-TW" smtClean="0"/>
+              <a:rPr lang="en-US" altLang="zh-TW"/>
               <a:t>Edit Master text styles</a:t>
             </a:r>
           </a:p>
           <a:p>
             <a:pPr lvl="1"/>
             <a:r>
-              <a:rPr lang="en-US" altLang="zh-TW" smtClean="0"/>
+              <a:rPr lang="en-US" altLang="zh-TW"/>
               <a:t>Second level</a:t>
             </a:r>
           </a:p>
           <a:p>
             <a:pPr lvl="2"/>
             <a:r>
-              <a:rPr lang="en-US" altLang="zh-TW" smtClean="0"/>
+              <a:rPr lang="en-US" altLang="zh-TW"/>
               <a:t>Third level</a:t>
             </a:r>
           </a:p>
           <a:p>
             <a:pPr lvl="3"/>
             <a:r>
-              <a:rPr lang="en-US" altLang="zh-TW" smtClean="0"/>
+              <a:rPr lang="en-US" altLang="zh-TW"/>
               <a:t>Fourth level</a:t>
             </a:r>
           </a:p>
           <a:p>
             <a:pPr lvl="4"/>
             <a:r>
-              <a:rPr lang="en-US" altLang="zh-TW" smtClean="0"/>
+              <a:rPr lang="en-US" altLang="zh-TW"/>
               <a:t>Fifth level</a:t>
             </a:r>
             <a:endParaRPr lang="zh-TW" altLang="en-US"/>
@@ -1782,7 +1782,7 @@
           <a:p>
             <a:fld id="{EB320EF2-FA3C-443D-80BF-461CEB4436F5}" type="datetimeFigureOut">
               <a:rPr lang="zh-TW" altLang="en-US" smtClean="0"/>
-              <a:t>2021/12/25</a:t>
+              <a:t>2025/12/18</a:t>
             </a:fld>
             <a:endParaRPr lang="zh-TW" altLang="en-US"/>
           </a:p>
@@ -1876,7 +1876,7 @@
           <a:lstStyle/>
           <a:p>
             <a:r>
-              <a:rPr lang="en-US" altLang="zh-TW" smtClean="0"/>
+              <a:rPr lang="en-US" altLang="zh-TW"/>
               <a:t>Click to edit Master title style</a:t>
             </a:r>
             <a:endParaRPr lang="zh-TW" altLang="en-US"/>
@@ -1900,7 +1900,7 @@
           <a:p>
             <a:fld id="{EB320EF2-FA3C-443D-80BF-461CEB4436F5}" type="datetimeFigureOut">
               <a:rPr lang="zh-TW" altLang="en-US" smtClean="0"/>
-              <a:t>2021/12/25</a:t>
+              <a:t>2025/12/18</a:t>
             </a:fld>
             <a:endParaRPr lang="zh-TW" altLang="en-US"/>
           </a:p>
@@ -1995,7 +1995,7 @@
           <a:p>
             <a:fld id="{EB320EF2-FA3C-443D-80BF-461CEB4436F5}" type="datetimeFigureOut">
               <a:rPr lang="zh-TW" altLang="en-US" smtClean="0"/>
-              <a:t>2021/12/25</a:t>
+              <a:t>2025/12/18</a:t>
             </a:fld>
             <a:endParaRPr lang="zh-TW" altLang="en-US"/>
           </a:p>
@@ -2098,7 +2098,7 @@
           </a:lstStyle>
           <a:p>
             <a:r>
-              <a:rPr lang="en-US" altLang="zh-TW" smtClean="0"/>
+              <a:rPr lang="en-US" altLang="zh-TW"/>
               <a:t>Click to edit Master title style</a:t>
             </a:r>
             <a:endParaRPr lang="zh-TW" altLang="en-US"/>
@@ -2155,35 +2155,35 @@
           <a:p>
             <a:pPr lvl="0"/>
             <a:r>
-              <a:rPr lang="en-US" altLang="zh-TW" smtClean="0"/>
+              <a:rPr lang="en-US" altLang="zh-TW"/>
               <a:t>Edit Master text styles</a:t>
             </a:r>
           </a:p>
           <a:p>
             <a:pPr lvl="1"/>
             <a:r>
-              <a:rPr lang="en-US" altLang="zh-TW" smtClean="0"/>
+              <a:rPr lang="en-US" altLang="zh-TW"/>
               <a:t>Second level</a:t>
             </a:r>
           </a:p>
           <a:p>
             <a:pPr lvl="2"/>
             <a:r>
-              <a:rPr lang="en-US" altLang="zh-TW" smtClean="0"/>
+              <a:rPr lang="en-US" altLang="zh-TW"/>
               <a:t>Third level</a:t>
             </a:r>
           </a:p>
           <a:p>
             <a:pPr lvl="3"/>
             <a:r>
-              <a:rPr lang="en-US" altLang="zh-TW" smtClean="0"/>
+              <a:rPr lang="en-US" altLang="zh-TW"/>
               <a:t>Fourth level</a:t>
             </a:r>
           </a:p>
           <a:p>
             <a:pPr lvl="4"/>
             <a:r>
-              <a:rPr lang="en-US" altLang="zh-TW" smtClean="0"/>
+              <a:rPr lang="en-US" altLang="zh-TW"/>
               <a:t>Fifth level</a:t>
             </a:r>
             <a:endParaRPr lang="zh-TW" altLang="en-US"/>
@@ -2249,7 +2249,7 @@
           <a:p>
             <a:pPr lvl="0"/>
             <a:r>
-              <a:rPr lang="en-US" altLang="zh-TW" smtClean="0"/>
+              <a:rPr lang="en-US" altLang="zh-TW"/>
               <a:t>Edit Master text styles</a:t>
             </a:r>
           </a:p>
@@ -2272,7 +2272,7 @@
           <a:p>
             <a:fld id="{EB320EF2-FA3C-443D-80BF-461CEB4436F5}" type="datetimeFigureOut">
               <a:rPr lang="zh-TW" altLang="en-US" smtClean="0"/>
-              <a:t>2021/12/25</a:t>
+              <a:t>2025/12/18</a:t>
             </a:fld>
             <a:endParaRPr lang="zh-TW" altLang="en-US"/>
           </a:p>
@@ -2375,7 +2375,7 @@
           </a:lstStyle>
           <a:p>
             <a:r>
-              <a:rPr lang="en-US" altLang="zh-TW" smtClean="0"/>
+              <a:rPr lang="en-US" altLang="zh-TW"/>
               <a:t>Click to edit Master title style</a:t>
             </a:r>
             <a:endParaRPr lang="zh-TW" altLang="en-US"/>
@@ -2440,7 +2440,7 @@
           </a:lstStyle>
           <a:p>
             <a:r>
-              <a:rPr lang="en-US" altLang="zh-TW" smtClean="0"/>
+              <a:rPr lang="en-US" altLang="zh-TW"/>
               <a:t>Click icon to add picture</a:t>
             </a:r>
             <a:endParaRPr lang="zh-TW" altLang="en-US"/>
@@ -2506,7 +2506,7 @@
           <a:p>
             <a:pPr lvl="0"/>
             <a:r>
-              <a:rPr lang="en-US" altLang="zh-TW" smtClean="0"/>
+              <a:rPr lang="en-US" altLang="zh-TW"/>
               <a:t>Edit Master text styles</a:t>
             </a:r>
           </a:p>
@@ -2529,7 +2529,7 @@
           <a:p>
             <a:fld id="{EB320EF2-FA3C-443D-80BF-461CEB4436F5}" type="datetimeFigureOut">
               <a:rPr lang="zh-TW" altLang="en-US" smtClean="0"/>
-              <a:t>2021/12/25</a:t>
+              <a:t>2025/12/18</a:t>
             </a:fld>
             <a:endParaRPr lang="zh-TW" altLang="en-US"/>
           </a:p>
@@ -2643,10 +2643,9 @@
           <a:lstStyle/>
           <a:p>
             <a:r>
-              <a:rPr lang="zh-TW" altLang="en-US" smtClean="0"/>
+              <a:rPr lang="zh-TW" altLang="en-US"/>
               <a:t>按一下以編輯母片標題樣式</a:t>
             </a:r>
-            <a:endParaRPr lang="zh-TW" altLang="en-US"/>
           </a:p>
         </p:txBody>
       </p:sp>
@@ -2677,38 +2676,37 @@
           <a:p>
             <a:pPr lvl="0"/>
             <a:r>
-              <a:rPr lang="zh-TW" altLang="en-US" smtClean="0"/>
+              <a:rPr lang="zh-TW" altLang="en-US"/>
               <a:t>按一下以編輯母片文字樣式</a:t>
             </a:r>
           </a:p>
           <a:p>
             <a:pPr lvl="1"/>
             <a:r>
-              <a:rPr lang="zh-TW" altLang="en-US" smtClean="0"/>
+              <a:rPr lang="zh-TW" altLang="en-US"/>
               <a:t>第二層</a:t>
             </a:r>
           </a:p>
           <a:p>
             <a:pPr lvl="2"/>
             <a:r>
-              <a:rPr lang="zh-TW" altLang="en-US" smtClean="0"/>
+              <a:rPr lang="zh-TW" altLang="en-US"/>
               <a:t>第三層</a:t>
             </a:r>
           </a:p>
           <a:p>
             <a:pPr lvl="3"/>
             <a:r>
-              <a:rPr lang="zh-TW" altLang="en-US" smtClean="0"/>
+              <a:rPr lang="zh-TW" altLang="en-US"/>
               <a:t>第四層</a:t>
             </a:r>
           </a:p>
           <a:p>
             <a:pPr lvl="4"/>
             <a:r>
-              <a:rPr lang="zh-TW" altLang="en-US" smtClean="0"/>
+              <a:rPr lang="zh-TW" altLang="en-US"/>
               <a:t>第五層</a:t>
             </a:r>
-            <a:endParaRPr lang="zh-TW" altLang="en-US"/>
           </a:p>
         </p:txBody>
       </p:sp>
@@ -2747,7 +2745,7 @@
           <a:p>
             <a:fld id="{EB320EF2-FA3C-443D-80BF-461CEB4436F5}" type="datetimeFigureOut">
               <a:rPr lang="zh-TW" altLang="en-US" smtClean="0"/>
-              <a:t>2021/12/25</a:t>
+              <a:t>2025/12/18</a:t>
             </a:fld>
             <a:endParaRPr lang="zh-TW" altLang="en-US"/>
           </a:p>
@@ -3138,7 +3136,7 @@
           <a:lstStyle/>
           <a:p>
             <a:r>
-              <a:rPr lang="zh-CN" altLang="en-US" b="1" dirty="0" smtClean="0">
+              <a:rPr lang="zh-CN" altLang="en-US" b="1" dirty="0">
                 <a:latin typeface="微軟正黑體" pitchFamily="34" charset="-120"/>
                 <a:ea typeface="微軟正黑體" pitchFamily="34" charset="-120"/>
               </a:rPr>
@@ -3181,21 +3179,7 @@
                 <a:latin typeface="微軟正黑體" pitchFamily="34" charset="-120"/>
                 <a:ea typeface="微軟正黑體" pitchFamily="34" charset="-120"/>
               </a:rPr>
-              <a:t>耶穌愛</a:t>
-            </a:r>
-            <a:r>
-              <a:rPr lang="zh-CN" altLang="en-US" sz="5400" b="1" dirty="0" smtClean="0">
-                <a:latin typeface="微軟正黑體" pitchFamily="34" charset="-120"/>
-                <a:ea typeface="微軟正黑體" pitchFamily="34" charset="-120"/>
-              </a:rPr>
-              <a:t>你  耶</a:t>
-            </a:r>
-            <a:r>
-              <a:rPr lang="zh-CN" altLang="en-US" sz="5400" b="1" dirty="0">
-                <a:latin typeface="微軟正黑體" pitchFamily="34" charset="-120"/>
-                <a:ea typeface="微軟正黑體" pitchFamily="34" charset="-120"/>
-              </a:rPr>
-              <a:t>穌愛你</a:t>
+              <a:t>耶穌愛你  耶穌愛你</a:t>
             </a:r>
             <a:endParaRPr lang="en-US" altLang="zh-CN" sz="5400" b="1" dirty="0">
               <a:latin typeface="微軟正黑體" pitchFamily="34" charset="-120"/>
@@ -3213,6 +3197,20 @@
               </a:rPr>
               <a:t>耶穌愛你</a:t>
             </a:r>
+            <a:r>
+              <a:rPr lang="en-US" altLang="zh-CN" sz="5400" b="1" dirty="0">
+                <a:latin typeface="微軟正黑體" pitchFamily="34" charset="-120"/>
+                <a:ea typeface="微軟正黑體" pitchFamily="34" charset="-120"/>
+              </a:rPr>
+              <a:t>  </a:t>
+            </a:r>
+            <a:r>
+              <a:rPr lang="zh-CN" altLang="en-US" sz="5400" b="1" dirty="0">
+                <a:latin typeface="微軟正黑體" pitchFamily="34" charset="-120"/>
+                <a:ea typeface="微軟正黑體" pitchFamily="34" charset="-120"/>
+              </a:rPr>
+              <a:t>不要忘記</a:t>
+            </a:r>
             <a:endParaRPr lang="en-US" altLang="zh-CN" sz="5400" b="1" dirty="0">
               <a:latin typeface="微軟正黑體" pitchFamily="34" charset="-120"/>
               <a:ea typeface="微軟正黑體" pitchFamily="34" charset="-120"/>
@@ -3227,51 +3225,7 @@
                 <a:latin typeface="微軟正黑體" pitchFamily="34" charset="-120"/>
                 <a:ea typeface="微軟正黑體" pitchFamily="34" charset="-120"/>
               </a:rPr>
-              <a:t>不要忘</a:t>
-            </a:r>
-            <a:r>
-              <a:rPr lang="zh-CN" altLang="en-US" sz="5400" b="1" dirty="0" smtClean="0">
-                <a:latin typeface="微軟正黑體" pitchFamily="34" charset="-120"/>
-                <a:ea typeface="微軟正黑體" pitchFamily="34" charset="-120"/>
-              </a:rPr>
-              <a:t>記</a:t>
-            </a:r>
-            <a:endParaRPr lang="en-US" altLang="zh-CN" sz="5400" b="1" dirty="0" smtClean="0">
-              <a:latin typeface="微軟正黑體" pitchFamily="34" charset="-120"/>
-              <a:ea typeface="微軟正黑體" pitchFamily="34" charset="-120"/>
-            </a:endParaRPr>
-          </a:p>
-          <a:p>
-            <a:pPr algn="ctr">
-              <a:buNone/>
-            </a:pPr>
-            <a:r>
-              <a:rPr lang="zh-CN" altLang="en-US" sz="5400" b="1" dirty="0" smtClean="0">
-                <a:latin typeface="微軟正黑體" pitchFamily="34" charset="-120"/>
-                <a:ea typeface="微軟正黑體" pitchFamily="34" charset="-120"/>
-              </a:rPr>
-              <a:t>基</a:t>
-            </a:r>
-            <a:r>
-              <a:rPr lang="zh-CN" altLang="en-US" sz="5400" b="1" dirty="0">
-                <a:latin typeface="微軟正黑體" pitchFamily="34" charset="-120"/>
-                <a:ea typeface="微軟正黑體" pitchFamily="34" charset="-120"/>
-              </a:rPr>
-              <a:t>督耶</a:t>
-            </a:r>
-            <a:r>
-              <a:rPr lang="zh-CN" altLang="en-US" sz="5400" b="1" dirty="0" smtClean="0">
-                <a:latin typeface="微軟正黑體" pitchFamily="34" charset="-120"/>
-                <a:ea typeface="微軟正黑體" pitchFamily="34" charset="-120"/>
-              </a:rPr>
-              <a:t>穌降</a:t>
-            </a:r>
-            <a:r>
-              <a:rPr lang="zh-CN" altLang="en-US" sz="5400" b="1" dirty="0">
-                <a:latin typeface="微軟正黑體" pitchFamily="34" charset="-120"/>
-                <a:ea typeface="微軟正黑體" pitchFamily="34" charset="-120"/>
-              </a:rPr>
-              <a:t>生爲你</a:t>
+              <a:t>基督耶穌降生爲你</a:t>
             </a:r>
             <a:endParaRPr lang="en-US" altLang="zh-CN" sz="5400" b="1" dirty="0">
               <a:latin typeface="微軟正黑體" pitchFamily="34" charset="-120"/>
@@ -3315,13 +3269,6 @@
   <p:clrMapOvr>
     <a:masterClrMapping/>
   </p:clrMapOvr>
-  <p:timing>
-    <p:tnLst>
-      <p:par>
-        <p:cTn id="1" dur="indefinite" restart="never" nodeType="tmRoot"/>
-      </p:par>
-    </p:tnLst>
-  </p:timing>
 </p:sld>
 </file>
 
@@ -3358,7 +3305,7 @@
           <a:lstStyle/>
           <a:p>
             <a:r>
-              <a:rPr lang="zh-CN" altLang="en-US" b="1" dirty="0" smtClean="0">
+              <a:rPr lang="zh-CN" altLang="en-US" b="1" dirty="0">
                 <a:latin typeface="微軟正黑體" pitchFamily="34" charset="-120"/>
                 <a:ea typeface="微軟正黑體" pitchFamily="34" charset="-120"/>
               </a:rPr>
@@ -3401,7 +3348,7 @@
                 <a:latin typeface="微軟正黑體" pitchFamily="34" charset="-120"/>
                 <a:ea typeface="微軟正黑體" pitchFamily="34" charset="-120"/>
               </a:rPr>
-              <a:t>祂生在馬槽里</a:t>
+              <a:t>祂生在馬槽裡</a:t>
             </a:r>
             <a:endParaRPr lang="en-US" altLang="zh-CN" sz="5400" b="1" dirty="0">
               <a:latin typeface="微軟正黑體" pitchFamily="34" charset="-120"/>
@@ -3417,21 +3364,7 @@
                 <a:latin typeface="微軟正黑體" pitchFamily="34" charset="-120"/>
                 <a:ea typeface="微軟正黑體" pitchFamily="34" charset="-120"/>
               </a:rPr>
-              <a:t>捨</a:t>
-            </a:r>
-            <a:r>
-              <a:rPr lang="zh-CN" altLang="en-US" sz="5400" b="1" dirty="0" smtClean="0">
-                <a:latin typeface="微軟正黑體" pitchFamily="34" charset="-120"/>
-                <a:ea typeface="微軟正黑體" pitchFamily="34" charset="-120"/>
-              </a:rPr>
-              <a:t>尊貴來</a:t>
-            </a:r>
-            <a:r>
-              <a:rPr lang="zh-CN" altLang="en-US" sz="5400" b="1" dirty="0">
-                <a:latin typeface="微軟正黑體" pitchFamily="34" charset="-120"/>
-                <a:ea typeface="微軟正黑體" pitchFamily="34" charset="-120"/>
-              </a:rPr>
-              <a:t>救你</a:t>
+              <a:t>捨尊貴來救你</a:t>
             </a:r>
             <a:endParaRPr lang="en-US" altLang="zh-CN" sz="5400" b="1" dirty="0">
               <a:latin typeface="微軟正黑體" pitchFamily="34" charset="-120"/>
@@ -3477,13 +3410,6 @@
   <p:clrMapOvr>
     <a:masterClrMapping/>
   </p:clrMapOvr>
-  <p:timing>
-    <p:tnLst>
-      <p:par>
-        <p:cTn id="1" dur="indefinite" restart="never" nodeType="tmRoot"/>
-      </p:par>
-    </p:tnLst>
-  </p:timing>
 </p:sld>
 </file>
 
@@ -3520,7 +3446,7 @@
           <a:lstStyle/>
           <a:p>
             <a:r>
-              <a:rPr lang="zh-CN" altLang="en-US" b="1" dirty="0" smtClean="0">
+              <a:rPr lang="zh-CN" altLang="en-US" b="1" dirty="0">
                 <a:latin typeface="微軟正黑體" pitchFamily="34" charset="-120"/>
                 <a:ea typeface="微軟正黑體" pitchFamily="34" charset="-120"/>
               </a:rPr>
@@ -3563,7 +3489,21 @@
                 <a:latin typeface="微軟正黑體" pitchFamily="34" charset="-120"/>
                 <a:ea typeface="微軟正黑體" pitchFamily="34" charset="-120"/>
               </a:rPr>
-              <a:t>耶穌愛你耶穌愛你</a:t>
+              <a:t>耶穌</a:t>
+            </a:r>
+            <a:r>
+              <a:rPr lang="zh-CN" altLang="en-US" sz="5400" b="1">
+                <a:latin typeface="微軟正黑體" pitchFamily="34" charset="-120"/>
+                <a:ea typeface="微軟正黑體" pitchFamily="34" charset="-120"/>
+              </a:rPr>
+              <a:t>愛你  耶</a:t>
+            </a:r>
+            <a:r>
+              <a:rPr lang="zh-CN" altLang="en-US" sz="5400" b="1" dirty="0">
+                <a:latin typeface="微軟正黑體" pitchFamily="34" charset="-120"/>
+                <a:ea typeface="微軟正黑體" pitchFamily="34" charset="-120"/>
+              </a:rPr>
+              <a:t>穌愛你</a:t>
             </a:r>
             <a:endParaRPr lang="en-US" altLang="zh-CN" sz="5400" b="1" dirty="0">
               <a:latin typeface="微軟正黑體" pitchFamily="34" charset="-120"/>
@@ -3581,6 +3521,20 @@
               </a:rPr>
               <a:t>耶穌愛你</a:t>
             </a:r>
+            <a:r>
+              <a:rPr lang="en-US" altLang="zh-CN" sz="5400" b="1" dirty="0">
+                <a:latin typeface="微軟正黑體" pitchFamily="34" charset="-120"/>
+                <a:ea typeface="微軟正黑體" pitchFamily="34" charset="-120"/>
+              </a:rPr>
+              <a:t>  </a:t>
+            </a:r>
+            <a:r>
+              <a:rPr lang="zh-CN" altLang="en-US" sz="5400" b="1" dirty="0">
+                <a:latin typeface="微軟正黑體" pitchFamily="34" charset="-120"/>
+                <a:ea typeface="微軟正黑體" pitchFamily="34" charset="-120"/>
+              </a:rPr>
+              <a:t>不要忘記</a:t>
+            </a:r>
             <a:endParaRPr lang="en-US" altLang="zh-CN" sz="5400" b="1" dirty="0">
               <a:latin typeface="微軟正黑體" pitchFamily="34" charset="-120"/>
               <a:ea typeface="微軟正黑體" pitchFamily="34" charset="-120"/>
@@ -3595,51 +3549,7 @@
                 <a:latin typeface="微軟正黑體" pitchFamily="34" charset="-120"/>
                 <a:ea typeface="微軟正黑體" pitchFamily="34" charset="-120"/>
               </a:rPr>
-              <a:t>不要忘</a:t>
-            </a:r>
-            <a:r>
-              <a:rPr lang="zh-CN" altLang="en-US" sz="5400" b="1" dirty="0" smtClean="0">
-                <a:latin typeface="微軟正黑體" pitchFamily="34" charset="-120"/>
-                <a:ea typeface="微軟正黑體" pitchFamily="34" charset="-120"/>
-              </a:rPr>
-              <a:t>記</a:t>
-            </a:r>
-            <a:endParaRPr lang="en-US" altLang="zh-CN" sz="5400" b="1" dirty="0" smtClean="0">
-              <a:latin typeface="微軟正黑體" pitchFamily="34" charset="-120"/>
-              <a:ea typeface="微軟正黑體" pitchFamily="34" charset="-120"/>
-            </a:endParaRPr>
-          </a:p>
-          <a:p>
-            <a:pPr algn="ctr">
-              <a:buNone/>
-            </a:pPr>
-            <a:r>
-              <a:rPr lang="zh-CN" altLang="en-US" sz="5400" b="1" dirty="0" smtClean="0">
-                <a:latin typeface="微軟正黑體" pitchFamily="34" charset="-120"/>
-                <a:ea typeface="微軟正黑體" pitchFamily="34" charset="-120"/>
-              </a:rPr>
-              <a:t>基</a:t>
-            </a:r>
-            <a:r>
-              <a:rPr lang="zh-CN" altLang="en-US" sz="5400" b="1" dirty="0">
-                <a:latin typeface="微軟正黑體" pitchFamily="34" charset="-120"/>
-                <a:ea typeface="微軟正黑體" pitchFamily="34" charset="-120"/>
-              </a:rPr>
-              <a:t>督耶</a:t>
-            </a:r>
-            <a:r>
-              <a:rPr lang="zh-CN" altLang="en-US" sz="5400" b="1" dirty="0" smtClean="0">
-                <a:latin typeface="微軟正黑體" pitchFamily="34" charset="-120"/>
-                <a:ea typeface="微軟正黑體" pitchFamily="34" charset="-120"/>
-              </a:rPr>
-              <a:t>穌降</a:t>
-            </a:r>
-            <a:r>
-              <a:rPr lang="zh-CN" altLang="en-US" sz="5400" b="1" dirty="0">
-                <a:latin typeface="微軟正黑體" pitchFamily="34" charset="-120"/>
-                <a:ea typeface="微軟正黑體" pitchFamily="34" charset="-120"/>
-              </a:rPr>
-              <a:t>生爲你</a:t>
+              <a:t>基督耶穌降生爲你</a:t>
             </a:r>
             <a:endParaRPr lang="en-US" altLang="zh-CN" sz="5400" b="1" dirty="0">
               <a:latin typeface="微軟正黑體" pitchFamily="34" charset="-120"/>
@@ -3653,13 +3563,6 @@
   <p:clrMapOvr>
     <a:masterClrMapping/>
   </p:clrMapOvr>
-  <p:timing>
-    <p:tnLst>
-      <p:par>
-        <p:cTn id="1" dur="indefinite" restart="never" nodeType="tmRoot"/>
-      </p:par>
-    </p:tnLst>
-  </p:timing>
 </p:sld>
 </file>
 
